--- a/a7/packages/A7 Unit 4 - Solving Problems with Rational Numbers/Slides/A7 4.05  Slides.pptx
+++ b/a7/packages/A7 Unit 4 - Solving Problems with Rational Numbers/Slides/A7 4.05  Slides.pptx
@@ -14962,7 +14962,7 @@
                 </a:solidFill>
                 <a:latin typeface="Century Schoolbook"/>
               </a:rPr>
-              <a:t>Every skill listed is required, to a SmartScore of 67. Due at the start of the next class.</a:t>
+              <a:t>Every skill listed is required, to a SmartScore of 67. This skill continues tomorrow: one assignment, due at the start of the class after 4.06.</a:t>
             </a:r>
           </a:p>
         </p:txBody>

--- a/a7/packages/A7 Unit 4 - Solving Problems with Rational Numbers/Slides/A7 4.05  Slides.pptx
+++ b/a7/packages/A7 Unit 4 - Solving Problems with Rational Numbers/Slides/A7 4.05  Slides.pptx
@@ -3817,7 +3817,7 @@
       </p:sp>
       <p:pic>
         <p:nvPicPr>
-          <p:cNvPr id="9" name="Picture 8" descr="8dc2de9a2f7be10c.png"/>
+          <p:cNvPr id="9" name="Picture 8" descr="b80aa59125558618.png"/>
           <p:cNvPicPr>
             <a:picLocks noChangeAspect="1"/>
           </p:cNvPicPr>
@@ -3831,8 +3831,8 @@
         </p:blipFill>
         <p:spPr>
           <a:xfrm>
-            <a:off x="4375403" y="2194560"/>
-            <a:ext cx="3410712" cy="707136"/>
+            <a:off x="4303775" y="2194560"/>
+            <a:ext cx="3553968" cy="859536"/>
           </a:xfrm>
           <a:prstGeom prst="rect">
             <a:avLst/>
@@ -3847,7 +3847,7 @@
         </p:nvSpPr>
         <p:spPr>
           <a:xfrm>
-            <a:off x="777240" y="3221736"/>
+            <a:off x="777240" y="3374136"/>
             <a:ext cx="10607040" cy="429370"/>
           </a:xfrm>
           <a:prstGeom prst="rect">
@@ -4496,7 +4496,7 @@
       </p:sp>
       <p:pic>
         <p:nvPicPr>
-          <p:cNvPr id="9" name="Picture 8" descr="71052b92f8ae6931.png"/>
+          <p:cNvPr id="9" name="Picture 8" descr="922b0a873b8b5f16.png"/>
           <p:cNvPicPr>
             <a:picLocks noChangeAspect="1"/>
           </p:cNvPicPr>
@@ -4555,7 +4555,7 @@
       </p:sp>
       <p:pic>
         <p:nvPicPr>
-          <p:cNvPr id="11" name="Picture 10" descr="da0807cbbccc7274.png"/>
+          <p:cNvPr id="11" name="Picture 10" descr="eb44f304539690d6.png"/>
           <p:cNvPicPr>
             <a:picLocks noChangeAspect="1"/>
           </p:cNvPicPr>
@@ -4614,7 +4614,7 @@
       </p:sp>
       <p:pic>
         <p:nvPicPr>
-          <p:cNvPr id="13" name="Picture 12" descr="adacafcdf286c693.png"/>
+          <p:cNvPr id="13" name="Picture 12" descr="1e8b8e5b31eeb1aa.png"/>
           <p:cNvPicPr>
             <a:picLocks noChangeAspect="1"/>
           </p:cNvPicPr>
@@ -4629,7 +4629,7 @@
         <p:spPr>
           <a:xfrm>
             <a:off x="1828800" y="3474720"/>
-            <a:ext cx="1987296" cy="280416"/>
+            <a:ext cx="1990344" cy="280416"/>
           </a:xfrm>
           <a:prstGeom prst="rect">
             <a:avLst/>
@@ -4644,7 +4644,7 @@
         </p:nvSpPr>
         <p:spPr>
           <a:xfrm>
-            <a:off x="4273296" y="3386328"/>
+            <a:off x="4276344" y="3386328"/>
             <a:ext cx="6400800" cy="502920"/>
           </a:xfrm>
           <a:prstGeom prst="rect">
@@ -5258,7 +5258,7 @@
       </p:sp>
       <p:pic>
         <p:nvPicPr>
-          <p:cNvPr id="9" name="Picture 8" descr="98a08d8a76531abc.png"/>
+          <p:cNvPr id="9" name="Picture 8" descr="03f17111b774a658.png"/>
           <p:cNvPicPr>
             <a:picLocks noChangeAspect="1"/>
           </p:cNvPicPr>
@@ -5272,8 +5272,8 @@
         </p:blipFill>
         <p:spPr>
           <a:xfrm>
-            <a:off x="3828288" y="2194560"/>
-            <a:ext cx="4504944" cy="658368"/>
+            <a:off x="3826763" y="2194560"/>
+            <a:ext cx="4507992" cy="661416"/>
           </a:xfrm>
           <a:prstGeom prst="rect">
             <a:avLst/>
@@ -5288,7 +5288,7 @@
         </p:nvSpPr>
         <p:spPr>
           <a:xfrm>
-            <a:off x="777240" y="3172968"/>
+            <a:off x="777240" y="3176016"/>
             <a:ext cx="10607040" cy="429370"/>
           </a:xfrm>
           <a:prstGeom prst="rect">
@@ -5972,7 +5972,7 @@
       </p:sp>
       <p:pic>
         <p:nvPicPr>
-          <p:cNvPr id="9" name="Picture 8" descr="bba822fb928b22ac.png"/>
+          <p:cNvPr id="9" name="Picture 8" descr="a01c60804f53663f.png"/>
           <p:cNvPicPr>
             <a:picLocks noChangeAspect="1"/>
           </p:cNvPicPr>
@@ -5986,8 +5986,8 @@
         </p:blipFill>
         <p:spPr>
           <a:xfrm>
-            <a:off x="5554979" y="2103120"/>
-            <a:ext cx="1051560" cy="502920"/>
+            <a:off x="5559551" y="2103120"/>
+            <a:ext cx="1042415" cy="502920"/>
           </a:xfrm>
           <a:prstGeom prst="rect">
             <a:avLst/>
@@ -7569,7 +7569,7 @@
         <p:spPr>
           <a:xfrm>
             <a:off x="1874519" y="1760220"/>
-            <a:ext cx="7653020" cy="457200"/>
+            <a:ext cx="6984958" cy="457200"/>
           </a:xfrm>
           <a:prstGeom prst="rect">
             <a:avLst/>
@@ -7578,7 +7578,7 @@
         </p:spPr>
         <p:txBody>
           <a:bodyPr wrap="none" lIns="45720" rIns="45720" tIns="18288" bIns="18288" anchor="ctr">
-            <a:spAutoFit/>
+            <a:noAutofit/>
           </a:bodyPr>
           <a:lstStyle/>
           <a:p>
@@ -7604,7 +7604,7 @@
         <p:spPr>
           <a:xfrm>
             <a:off x="1874519" y="2372868"/>
-            <a:ext cx="969771" cy="457200"/>
+            <a:ext cx="726811" cy="457200"/>
           </a:xfrm>
           <a:prstGeom prst="rect">
             <a:avLst/>
@@ -7613,7 +7613,7 @@
         </p:spPr>
         <p:txBody>
           <a:bodyPr wrap="none" lIns="45720" rIns="45720" tIns="18288" bIns="18288" anchor="ctr">
-            <a:spAutoFit/>
+            <a:noAutofit/>
           </a:bodyPr>
           <a:lstStyle/>
           <a:p>
@@ -7646,7 +7646,7 @@
         </p:blipFill>
         <p:spPr>
           <a:xfrm>
-            <a:off x="2707132" y="2432304"/>
+            <a:off x="2464171" y="2432304"/>
             <a:ext cx="2441448" cy="338328"/>
           </a:xfrm>
           <a:prstGeom prst="rect">
@@ -7663,7 +7663,7 @@
         <p:spPr>
           <a:xfrm>
             <a:off x="1874519" y="2985516"/>
-            <a:ext cx="3551936" cy="457200"/>
+            <a:ext cx="3064939" cy="457200"/>
           </a:xfrm>
           <a:prstGeom prst="rect">
             <a:avLst/>
@@ -7672,7 +7672,7 @@
         </p:spPr>
         <p:txBody>
           <a:bodyPr wrap="none" lIns="45720" rIns="45720" tIns="18288" bIns="18288" anchor="ctr">
-            <a:spAutoFit/>
+            <a:noAutofit/>
           </a:bodyPr>
           <a:lstStyle/>
           <a:p>
@@ -7705,7 +7705,7 @@
         </p:blipFill>
         <p:spPr>
           <a:xfrm>
-            <a:off x="5289296" y="3009900"/>
+            <a:off x="4802299" y="3009900"/>
             <a:ext cx="853440" cy="408432"/>
           </a:xfrm>
           <a:prstGeom prst="rect">
@@ -7722,7 +7722,7 @@
         <p:spPr>
           <a:xfrm>
             <a:off x="1874519" y="3598164"/>
-            <a:ext cx="2640584" cy="457200"/>
+            <a:ext cx="2276518" cy="457200"/>
           </a:xfrm>
           <a:prstGeom prst="rect">
             <a:avLst/>
@@ -7731,7 +7731,7 @@
         </p:spPr>
         <p:txBody>
           <a:bodyPr wrap="none" lIns="45720" rIns="45720" tIns="18288" bIns="18288" anchor="ctr">
-            <a:spAutoFit/>
+            <a:noAutofit/>
           </a:bodyPr>
           <a:lstStyle/>
           <a:p>
@@ -7764,7 +7764,7 @@
         </p:blipFill>
         <p:spPr>
           <a:xfrm>
-            <a:off x="4377944" y="3710940"/>
+            <a:off x="4013878" y="3710940"/>
             <a:ext cx="1155192" cy="231648"/>
           </a:xfrm>
           <a:prstGeom prst="rect">
@@ -8037,7 +8037,7 @@
       </p:sp>
       <p:pic>
         <p:nvPicPr>
-          <p:cNvPr id="9" name="Picture 8" descr="a4ee34a66ada29c1.png"/>
+          <p:cNvPr id="9" name="Picture 8" descr="e9ce12ee5f035ada.png"/>
           <p:cNvPicPr>
             <a:picLocks noChangeAspect="1"/>
           </p:cNvPicPr>
@@ -8051,8 +8051,8 @@
         </p:blipFill>
         <p:spPr>
           <a:xfrm>
-            <a:off x="5417820" y="2103120"/>
-            <a:ext cx="1325880" cy="502920"/>
+            <a:off x="5420867" y="2103120"/>
+            <a:ext cx="1319784" cy="502920"/>
           </a:xfrm>
           <a:prstGeom prst="rect">
             <a:avLst/>
@@ -8751,7 +8751,7 @@
       </p:sp>
       <p:pic>
         <p:nvPicPr>
-          <p:cNvPr id="9" name="Picture 8" descr="3f127ed15696cdab.png"/>
+          <p:cNvPr id="9" name="Picture 8" descr="e42a74bac51388c9.png"/>
           <p:cNvPicPr>
             <a:picLocks noChangeAspect="1"/>
           </p:cNvPicPr>
@@ -8765,8 +8765,8 @@
         </p:blipFill>
         <p:spPr>
           <a:xfrm>
-            <a:off x="5274563" y="2103120"/>
-            <a:ext cx="1612392" cy="502920"/>
+            <a:off x="5277612" y="2103120"/>
+            <a:ext cx="1606296" cy="502920"/>
           </a:xfrm>
           <a:prstGeom prst="rect">
             <a:avLst/>
@@ -9204,7 +9204,7 @@
                 </a:solidFill>
                 <a:latin typeface="Century Schoolbook"/>
               </a:rPr>
-              <a:t>5</a:t>
+              <a:t>7</a:t>
             </a:r>
           </a:p>
         </p:txBody>
@@ -9248,7 +9248,7 @@
                 </a:solidFill>
                 <a:latin typeface="Century Schoolbook"/>
               </a:rPr>
-              <a:t>7</a:t>
+              <a:t>25</a:t>
             </a:r>
           </a:p>
         </p:txBody>
@@ -9292,7 +9292,7 @@
                 </a:solidFill>
                 <a:latin typeface="Century Schoolbook"/>
               </a:rPr>
-              <a:t>25</a:t>
+              <a:t>12.5</a:t>
             </a:r>
           </a:p>
         </p:txBody>
@@ -9336,7 +9336,7 @@
                 </a:solidFill>
                 <a:latin typeface="Century Schoolbook"/>
               </a:rPr>
-              <a:t>12.5</a:t>
+              <a:t>5</a:t>
             </a:r>
           </a:p>
         </p:txBody>
@@ -9641,7 +9641,7 @@
       </p:sp>
       <p:pic>
         <p:nvPicPr>
-          <p:cNvPr id="9" name="Picture 8" descr="3abe49e5e121038a.png"/>
+          <p:cNvPr id="9" name="Picture 8" descr="3c30f316583cb146.png"/>
           <p:cNvPicPr>
             <a:picLocks noChangeAspect="1"/>
           </p:cNvPicPr>
@@ -9655,8 +9655,8 @@
         </p:blipFill>
         <p:spPr>
           <a:xfrm>
-            <a:off x="5356859" y="2103120"/>
-            <a:ext cx="1447800" cy="502920"/>
+            <a:off x="5361432" y="2103120"/>
+            <a:ext cx="1438656" cy="502920"/>
           </a:xfrm>
           <a:prstGeom prst="rect">
             <a:avLst/>
@@ -9724,20 +9724,20 @@
             <a:r>
               <a:rPr sz="2400" b="1" i="0">
                 <a:solidFill>
-                  <a:srgbClr val="9E1B32"/>
+                  <a:srgbClr val="1A1A1A"/>
                 </a:solidFill>
                 <a:latin typeface="Century Schoolbook"/>
               </a:rPr>
               <a:t>A.   </a:t>
             </a:r>
             <a:r>
-              <a:rPr sz="2400" b="1" i="0">
-                <a:solidFill>
-                  <a:srgbClr val="9E1B32"/>
-                </a:solidFill>
-                <a:latin typeface="Century Schoolbook"/>
-              </a:rPr>
-              <a:t>5</a:t>
+              <a:rPr sz="2400" b="0" i="0">
+                <a:solidFill>
+                  <a:srgbClr val="1A1A1A"/>
+                </a:solidFill>
+                <a:latin typeface="Century Schoolbook"/>
+              </a:rPr>
+              <a:t>7</a:t>
             </a:r>
           </a:p>
         </p:txBody>
@@ -9781,7 +9781,7 @@
                 </a:solidFill>
                 <a:latin typeface="Century Schoolbook"/>
               </a:rPr>
-              <a:t>7</a:t>
+              <a:t>25</a:t>
             </a:r>
           </a:p>
         </p:txBody>
@@ -9825,7 +9825,7 @@
                 </a:solidFill>
                 <a:latin typeface="Century Schoolbook"/>
               </a:rPr>
-              <a:t>25</a:t>
+              <a:t>12.5</a:t>
             </a:r>
           </a:p>
         </p:txBody>
@@ -9856,20 +9856,20 @@
             <a:r>
               <a:rPr sz="2400" b="1" i="0">
                 <a:solidFill>
-                  <a:srgbClr val="1A1A1A"/>
+                  <a:srgbClr val="9E1B32"/>
                 </a:solidFill>
                 <a:latin typeface="Century Schoolbook"/>
               </a:rPr>
               <a:t>D.   </a:t>
             </a:r>
             <a:r>
-              <a:rPr sz="2400" b="0" i="0">
-                <a:solidFill>
-                  <a:srgbClr val="1A1A1A"/>
-                </a:solidFill>
-                <a:latin typeface="Century Schoolbook"/>
-              </a:rPr>
-              <a:t>12.5</a:t>
+              <a:rPr sz="2400" b="1" i="0">
+                <a:solidFill>
+                  <a:srgbClr val="9E1B32"/>
+                </a:solidFill>
+                <a:latin typeface="Century Schoolbook"/>
+              </a:rPr>
+              <a:t>5</a:t>
             </a:r>
           </a:p>
         </p:txBody>
@@ -9904,7 +9904,7 @@
                 </a:solidFill>
                 <a:latin typeface="Century Schoolbook"/>
               </a:rPr>
-              <a:t>Answer:   A — 5</a:t>
+              <a:t>Answer:   D — 5</a:t>
             </a:r>
           </a:p>
         </p:txBody>
@@ -10314,7 +10314,7 @@
                 </a:solidFill>
                 <a:latin typeface="Century Schoolbook"/>
               </a:rPr>
-              <a:t>4</a:t>
+              <a:t>not a real number</a:t>
             </a:r>
           </a:p>
         </p:txBody>
@@ -10402,7 +10402,7 @@
                 </a:solidFill>
                 <a:latin typeface="Century Schoolbook"/>
               </a:rPr>
-              <a:t>not a real number</a:t>
+              <a:t>4</a:t>
             </a:r>
           </a:p>
         </p:txBody>
@@ -10707,7 +10707,7 @@
       </p:sp>
       <p:pic>
         <p:nvPicPr>
-          <p:cNvPr id="9" name="Picture 8" descr="6e1bf63989c69b23.png"/>
+          <p:cNvPr id="9" name="Picture 8" descr="e2d33019ea26f919.png"/>
           <p:cNvPicPr>
             <a:picLocks noChangeAspect="1"/>
           </p:cNvPicPr>
@@ -10721,8 +10721,8 @@
         </p:blipFill>
         <p:spPr>
           <a:xfrm>
-            <a:off x="5519928" y="2103120"/>
-            <a:ext cx="1121664" cy="502920"/>
+            <a:off x="5521452" y="2103120"/>
+            <a:ext cx="1118616" cy="502920"/>
           </a:xfrm>
           <a:prstGeom prst="rect">
             <a:avLst/>
@@ -10847,7 +10847,7 @@
                 </a:solidFill>
                 <a:latin typeface="Century Schoolbook"/>
               </a:rPr>
-              <a:t>4</a:t>
+              <a:t>not a real number</a:t>
             </a:r>
           </a:p>
         </p:txBody>
@@ -10935,7 +10935,7 @@
                 </a:solidFill>
                 <a:latin typeface="Century Schoolbook"/>
               </a:rPr>
-              <a:t>not a real number</a:t>
+              <a:t>4</a:t>
             </a:r>
           </a:p>
         </p:txBody>
@@ -11240,7 +11240,7 @@
       </p:sp>
       <p:pic>
         <p:nvPicPr>
-          <p:cNvPr id="9" name="Picture 8" descr="fcd56d20f3cf9a80.png"/>
+          <p:cNvPr id="9" name="Picture 8" descr="a9ee2603fdcbc1fc.png"/>
           <p:cNvPicPr>
             <a:picLocks noChangeAspect="1"/>
           </p:cNvPicPr>
@@ -11254,8 +11254,8 @@
         </p:blipFill>
         <p:spPr>
           <a:xfrm>
-            <a:off x="5207507" y="2194560"/>
-            <a:ext cx="1746504" cy="643128"/>
+            <a:off x="5113019" y="2194560"/>
+            <a:ext cx="1935480" cy="813816"/>
           </a:xfrm>
           <a:prstGeom prst="rect">
             <a:avLst/>
@@ -11597,7 +11597,7 @@
       </p:sp>
       <p:pic>
         <p:nvPicPr>
-          <p:cNvPr id="9" name="Picture 8" descr="fcd56d20f3cf9a80.png"/>
+          <p:cNvPr id="9" name="Picture 8" descr="641b2a864f99c54b.png"/>
           <p:cNvPicPr>
             <a:picLocks noChangeAspect="1"/>
           </p:cNvPicPr>
@@ -11611,8 +11611,8 @@
         </p:blipFill>
         <p:spPr>
           <a:xfrm>
-            <a:off x="5207507" y="2103120"/>
-            <a:ext cx="1746504" cy="643128"/>
+            <a:off x="5116068" y="2103120"/>
+            <a:ext cx="1929384" cy="819912"/>
           </a:xfrm>
           <a:prstGeom prst="rect">
             <a:avLst/>
@@ -11627,7 +11627,7 @@
         </p:nvSpPr>
         <p:spPr>
           <a:xfrm>
-            <a:off x="1828800" y="3066287"/>
+            <a:off x="1828800" y="3243071"/>
             <a:ext cx="8503920" cy="548640"/>
           </a:xfrm>
           <a:prstGeom prst="rect">
@@ -12318,7 +12318,7 @@
         <p:spPr>
           <a:xfrm>
             <a:off x="1874519" y="1760220"/>
-            <a:ext cx="7653020" cy="457200"/>
+            <a:ext cx="6984958" cy="457200"/>
           </a:xfrm>
           <a:prstGeom prst="rect">
             <a:avLst/>
@@ -12327,7 +12327,7 @@
         </p:spPr>
         <p:txBody>
           <a:bodyPr wrap="none" lIns="45720" rIns="45720" tIns="18288" bIns="18288" anchor="ctr">
-            <a:spAutoFit/>
+            <a:noAutofit/>
           </a:bodyPr>
           <a:lstStyle/>
           <a:p>
@@ -12352,8 +12352,8 @@
         </p:nvSpPr>
         <p:spPr>
           <a:xfrm>
-            <a:off x="9939020" y="1760220"/>
-            <a:ext cx="379729" cy="457200"/>
+            <a:off x="9270958" y="1760220"/>
+            <a:ext cx="388052" cy="457200"/>
           </a:xfrm>
           <a:prstGeom prst="rect">
             <a:avLst/>
@@ -12362,7 +12362,7 @@
         </p:spPr>
         <p:txBody>
           <a:bodyPr wrap="none" lIns="45720" rIns="45720" tIns="18288" bIns="18288" anchor="ctr">
-            <a:spAutoFit/>
+            <a:noAutofit/>
           </a:bodyPr>
           <a:lstStyle/>
           <a:p>
@@ -12388,7 +12388,7 @@
         <p:spPr>
           <a:xfrm>
             <a:off x="1874519" y="2372868"/>
-            <a:ext cx="969771" cy="457200"/>
+            <a:ext cx="726811" cy="457200"/>
           </a:xfrm>
           <a:prstGeom prst="rect">
             <a:avLst/>
@@ -12397,7 +12397,7 @@
         </p:spPr>
         <p:txBody>
           <a:bodyPr wrap="none" lIns="45720" rIns="45720" tIns="18288" bIns="18288" anchor="ctr">
-            <a:spAutoFit/>
+            <a:noAutofit/>
           </a:bodyPr>
           <a:lstStyle/>
           <a:p>
@@ -12430,7 +12430,7 @@
         </p:blipFill>
         <p:spPr>
           <a:xfrm>
-            <a:off x="2707132" y="2432304"/>
+            <a:off x="2464171" y="2432304"/>
             <a:ext cx="2441448" cy="338328"/>
           </a:xfrm>
           <a:prstGeom prst="rect">
@@ -12446,8 +12446,8 @@
         </p:nvSpPr>
         <p:spPr>
           <a:xfrm>
-            <a:off x="5697220" y="2372868"/>
-            <a:ext cx="1565655" cy="457200"/>
+            <a:off x="5454259" y="2372868"/>
+            <a:ext cx="1302101" cy="457200"/>
           </a:xfrm>
           <a:prstGeom prst="rect">
             <a:avLst/>
@@ -12456,7 +12456,7 @@
         </p:spPr>
         <p:txBody>
           <a:bodyPr wrap="none" lIns="45720" rIns="45720" tIns="18288" bIns="18288" anchor="ctr">
-            <a:spAutoFit/>
+            <a:noAutofit/>
           </a:bodyPr>
           <a:lstStyle/>
           <a:p>
@@ -12491,7 +12491,7 @@
         <p:spPr>
           <a:xfrm>
             <a:off x="1874519" y="2985516"/>
-            <a:ext cx="3551936" cy="457200"/>
+            <a:ext cx="3064939" cy="457200"/>
           </a:xfrm>
           <a:prstGeom prst="rect">
             <a:avLst/>
@@ -12500,7 +12500,7 @@
         </p:spPr>
         <p:txBody>
           <a:bodyPr wrap="none" lIns="45720" rIns="45720" tIns="18288" bIns="18288" anchor="ctr">
-            <a:spAutoFit/>
+            <a:noAutofit/>
           </a:bodyPr>
           <a:lstStyle/>
           <a:p>
@@ -12533,7 +12533,7 @@
         </p:blipFill>
         <p:spPr>
           <a:xfrm>
-            <a:off x="5289296" y="3009900"/>
+            <a:off x="4802299" y="3009900"/>
             <a:ext cx="853440" cy="408432"/>
           </a:xfrm>
           <a:prstGeom prst="rect">
@@ -12549,8 +12549,8 @@
         </p:nvSpPr>
         <p:spPr>
           <a:xfrm>
-            <a:off x="6691376" y="2985516"/>
-            <a:ext cx="549148" cy="457200"/>
+            <a:off x="6204379" y="2985516"/>
+            <a:ext cx="565792" cy="457200"/>
           </a:xfrm>
           <a:prstGeom prst="rect">
             <a:avLst/>
@@ -12559,7 +12559,7 @@
         </p:spPr>
         <p:txBody>
           <a:bodyPr wrap="none" lIns="45720" rIns="45720" tIns="18288" bIns="18288" anchor="ctr">
-            <a:spAutoFit/>
+            <a:noAutofit/>
           </a:bodyPr>
           <a:lstStyle/>
           <a:p>
@@ -12585,7 +12585,7 @@
         <p:spPr>
           <a:xfrm>
             <a:off x="1874519" y="3598164"/>
-            <a:ext cx="2640584" cy="457200"/>
+            <a:ext cx="2276518" cy="457200"/>
           </a:xfrm>
           <a:prstGeom prst="rect">
             <a:avLst/>
@@ -12594,7 +12594,7 @@
         </p:spPr>
         <p:txBody>
           <a:bodyPr wrap="none" lIns="45720" rIns="45720" tIns="18288" bIns="18288" anchor="ctr">
-            <a:spAutoFit/>
+            <a:noAutofit/>
           </a:bodyPr>
           <a:lstStyle/>
           <a:p>
@@ -12627,7 +12627,7 @@
         </p:blipFill>
         <p:spPr>
           <a:xfrm>
-            <a:off x="4377944" y="3710940"/>
+            <a:off x="4013878" y="3710940"/>
             <a:ext cx="1155192" cy="231648"/>
           </a:xfrm>
           <a:prstGeom prst="rect">
@@ -12643,8 +12643,8 @@
         </p:nvSpPr>
         <p:spPr>
           <a:xfrm>
-            <a:off x="6081776" y="3598164"/>
-            <a:ext cx="379729" cy="457200"/>
+            <a:off x="5717710" y="3598164"/>
+            <a:ext cx="388052" cy="457200"/>
           </a:xfrm>
           <a:prstGeom prst="rect">
             <a:avLst/>
@@ -12653,7 +12653,7 @@
         </p:spPr>
         <p:txBody>
           <a:bodyPr wrap="none" lIns="45720" rIns="45720" tIns="18288" bIns="18288" anchor="ctr">
-            <a:spAutoFit/>
+            <a:noAutofit/>
           </a:bodyPr>
           <a:lstStyle/>
           <a:p>
@@ -12935,7 +12935,7 @@
       </p:sp>
       <p:pic>
         <p:nvPicPr>
-          <p:cNvPr id="9" name="Picture 8" descr="2ee0db6a490ede41.png"/>
+          <p:cNvPr id="9" name="Picture 8" descr="a56781a24b5677bc.png"/>
           <p:cNvPicPr>
             <a:picLocks noChangeAspect="1"/>
           </p:cNvPicPr>
@@ -13298,8 +13298,8 @@
         </p:nvSpPr>
         <p:spPr>
           <a:xfrm>
-            <a:off x="2012696" y="2217420"/>
-            <a:ext cx="3129280" cy="457200"/>
+            <a:off x="2282364" y="2217420"/>
+            <a:ext cx="2998470" cy="457200"/>
           </a:xfrm>
           <a:prstGeom prst="rect">
             <a:avLst/>
@@ -13308,7 +13308,7 @@
         </p:spPr>
         <p:txBody>
           <a:bodyPr wrap="none" lIns="45720" rIns="45720" tIns="18288" bIns="18288" anchor="ctr">
-            <a:spAutoFit/>
+            <a:noAutofit/>
           </a:bodyPr>
           <a:lstStyle/>
           <a:p>
@@ -13341,7 +13341,7 @@
         </p:blipFill>
         <p:spPr>
           <a:xfrm>
-            <a:off x="5004816" y="2194560"/>
+            <a:off x="5143675" y="2194560"/>
             <a:ext cx="1121664" cy="502920"/>
           </a:xfrm>
           <a:prstGeom prst="rect">
@@ -13357,8 +13357,8 @@
         </p:nvSpPr>
         <p:spPr>
           <a:xfrm>
-            <a:off x="6126480" y="2217420"/>
-            <a:ext cx="4159504" cy="457200"/>
+            <a:off x="6265339" y="2217420"/>
+            <a:ext cx="3750975" cy="457200"/>
           </a:xfrm>
           <a:prstGeom prst="rect">
             <a:avLst/>
@@ -13367,7 +13367,7 @@
         </p:spPr>
         <p:txBody>
           <a:bodyPr wrap="none" lIns="45720" rIns="45720" tIns="18288" bIns="18288" anchor="ctr">
-            <a:spAutoFit/>
+            <a:noAutofit/>
           </a:bodyPr>
           <a:lstStyle/>
           <a:p>
@@ -13795,8 +13795,8 @@
         </p:nvSpPr>
         <p:spPr>
           <a:xfrm>
-            <a:off x="2012696" y="2125979"/>
-            <a:ext cx="3129280" cy="457200"/>
+            <a:off x="2283888" y="2125979"/>
+            <a:ext cx="2998470" cy="457200"/>
           </a:xfrm>
           <a:prstGeom prst="rect">
             <a:avLst/>
@@ -13805,7 +13805,7 @@
         </p:spPr>
         <p:txBody>
           <a:bodyPr wrap="none" lIns="45720" rIns="45720" tIns="18288" bIns="18288" anchor="ctr">
-            <a:spAutoFit/>
+            <a:noAutofit/>
           </a:bodyPr>
           <a:lstStyle/>
           <a:p>
@@ -13824,7 +13824,7 @@
       </p:sp>
       <p:pic>
         <p:nvPicPr>
-          <p:cNvPr id="10" name="Picture 9" descr="81cf988981787399.png"/>
+          <p:cNvPr id="10" name="Picture 9" descr="1d8dbae40789857d.png"/>
           <p:cNvPicPr>
             <a:picLocks noChangeAspect="1"/>
           </p:cNvPicPr>
@@ -13838,8 +13838,8 @@
         </p:blipFill>
         <p:spPr>
           <a:xfrm>
-            <a:off x="5004816" y="2103120"/>
-            <a:ext cx="1121664" cy="502920"/>
+            <a:off x="5145199" y="2103120"/>
+            <a:ext cx="1118616" cy="502920"/>
           </a:xfrm>
           <a:prstGeom prst="rect">
             <a:avLst/>
@@ -13854,8 +13854,8 @@
         </p:nvSpPr>
         <p:spPr>
           <a:xfrm>
-            <a:off x="6126480" y="2125979"/>
-            <a:ext cx="4159504" cy="457200"/>
+            <a:off x="6263815" y="2125979"/>
+            <a:ext cx="3750975" cy="457200"/>
           </a:xfrm>
           <a:prstGeom prst="rect">
             <a:avLst/>
@@ -13864,7 +13864,7 @@
         </p:spPr>
         <p:txBody>
           <a:bodyPr wrap="none" lIns="45720" rIns="45720" tIns="18288" bIns="18288" anchor="ctr">
-            <a:spAutoFit/>
+            <a:noAutofit/>
           </a:bodyPr>
           <a:lstStyle/>
           <a:p>
@@ -15372,7 +15372,7 @@
       </p:cxnSp>
       <p:pic>
         <p:nvPicPr>
-          <p:cNvPr id="11" name="Picture 10" descr="2de9e5184c98bc63.png"/>
+          <p:cNvPr id="11" name="Picture 10" descr="6f10aaba5b6e762d.png"/>
           <p:cNvPicPr>
             <a:picLocks noChangeAspect="1"/>
           </p:cNvPicPr>
@@ -15386,8 +15386,8 @@
         </p:blipFill>
         <p:spPr>
           <a:xfrm>
-            <a:off x="3285744" y="2340864"/>
-            <a:ext cx="5590032" cy="502920"/>
+            <a:off x="3287268" y="2340864"/>
+            <a:ext cx="5586984" cy="502920"/>
           </a:xfrm>
           <a:prstGeom prst="rect">
             <a:avLst/>
@@ -15396,7 +15396,7 @@
       </p:pic>
       <p:pic>
         <p:nvPicPr>
-          <p:cNvPr id="12" name="Picture 11" descr="e40c05bb1358cee5.png"/>
+          <p:cNvPr id="12" name="Picture 11" descr="0f750478274c693a.png"/>
           <p:cNvPicPr>
             <a:picLocks noChangeAspect="1"/>
           </p:cNvPicPr>
@@ -15420,7 +15420,7 @@
       </p:pic>
       <p:pic>
         <p:nvPicPr>
-          <p:cNvPr id="13" name="Picture 12" descr="5018f30a2d72b93c.png"/>
+          <p:cNvPr id="13" name="Picture 12" descr="38c1b22d8ba50cd8.png"/>
           <p:cNvPicPr>
             <a:picLocks noChangeAspect="1"/>
           </p:cNvPicPr>
@@ -15434,8 +15434,8 @@
         </p:blipFill>
         <p:spPr>
           <a:xfrm>
-            <a:off x="2890520" y="3895344"/>
-            <a:ext cx="3297936" cy="502920"/>
+            <a:off x="3171715" y="3895344"/>
+            <a:ext cx="3294888" cy="502920"/>
           </a:xfrm>
           <a:prstGeom prst="rect">
             <a:avLst/>
@@ -15450,8 +15450,8 @@
         </p:nvSpPr>
         <p:spPr>
           <a:xfrm>
-            <a:off x="6188455" y="3918204"/>
-            <a:ext cx="2442464" cy="457200"/>
+            <a:off x="6466603" y="3918204"/>
+            <a:ext cx="1880073" cy="457200"/>
           </a:xfrm>
           <a:prstGeom prst="rect">
             <a:avLst/>
@@ -15460,7 +15460,7 @@
         </p:spPr>
         <p:txBody>
           <a:bodyPr wrap="none" lIns="45720" rIns="45720" tIns="18288" bIns="18288" anchor="ctr">
-            <a:spAutoFit/>
+            <a:noAutofit/>
           </a:bodyPr>
           <a:lstStyle/>
           <a:p>
@@ -15479,7 +15479,7 @@
       </p:sp>
       <p:pic>
         <p:nvPicPr>
-          <p:cNvPr id="15" name="Picture 14" descr="9a504c67d34b8224.png"/>
+          <p:cNvPr id="15" name="Picture 14" descr="af23067c54651ce4.png"/>
           <p:cNvPicPr>
             <a:picLocks noChangeAspect="1"/>
           </p:cNvPicPr>
@@ -15493,8 +15493,8 @@
         </p:blipFill>
         <p:spPr>
           <a:xfrm>
-            <a:off x="8493759" y="4000500"/>
-            <a:ext cx="777240" cy="292608"/>
+            <a:off x="8209516" y="4002024"/>
+            <a:ext cx="780288" cy="289560"/>
           </a:xfrm>
           <a:prstGeom prst="rect">
             <a:avLst/>
@@ -15836,7 +15836,7 @@
       </p:cxnSp>
       <p:pic>
         <p:nvPicPr>
-          <p:cNvPr id="10" name="Picture 9" descr="67593606fb2dc3f8.png"/>
+          <p:cNvPr id="10" name="Picture 9" descr="71ccef74cf5a6c5b.png"/>
           <p:cNvPicPr>
             <a:picLocks noChangeAspect="1"/>
           </p:cNvPicPr>
@@ -15850,7 +15850,7 @@
         </p:blipFill>
         <p:spPr>
           <a:xfrm>
-            <a:off x="1871979" y="2340864"/>
+            <a:off x="2613132" y="2340864"/>
             <a:ext cx="1420368" cy="502920"/>
           </a:xfrm>
           <a:prstGeom prst="rect">
@@ -15866,8 +15866,8 @@
         </p:nvSpPr>
         <p:spPr>
           <a:xfrm>
-            <a:off x="3292347" y="2363724"/>
-            <a:ext cx="1927352" cy="457200"/>
+            <a:off x="4033500" y="2363724"/>
+            <a:ext cx="1183151" cy="457200"/>
           </a:xfrm>
           <a:prstGeom prst="rect">
             <a:avLst/>
@@ -15876,7 +15876,7 @@
         </p:spPr>
         <p:txBody>
           <a:bodyPr wrap="none" lIns="45720" rIns="45720" tIns="18288" bIns="18288" anchor="ctr">
-            <a:spAutoFit/>
+            <a:noAutofit/>
           </a:bodyPr>
           <a:lstStyle/>
           <a:p>
@@ -15895,7 +15895,7 @@
       </p:sp>
       <p:pic>
         <p:nvPicPr>
-          <p:cNvPr id="12" name="Picture 11" descr="ef0fd82066a02cf0.png"/>
+          <p:cNvPr id="12" name="Picture 11" descr="099a845693bde0eb.png"/>
           <p:cNvPicPr>
             <a:picLocks noChangeAspect="1"/>
           </p:cNvPicPr>
@@ -15909,8 +15909,8 @@
         </p:blipFill>
         <p:spPr>
           <a:xfrm>
-            <a:off x="5082540" y="2340864"/>
-            <a:ext cx="1429512" cy="502920"/>
+            <a:off x="5079492" y="2340864"/>
+            <a:ext cx="1432560" cy="502920"/>
           </a:xfrm>
           <a:prstGeom prst="rect">
             <a:avLst/>
@@ -15925,8 +15925,8 @@
         </p:nvSpPr>
         <p:spPr>
           <a:xfrm>
-            <a:off x="6512052" y="2363724"/>
-            <a:ext cx="1927352" cy="457200"/>
+            <a:off x="6512051" y="2363724"/>
+            <a:ext cx="1183151" cy="457200"/>
           </a:xfrm>
           <a:prstGeom prst="rect">
             <a:avLst/>
@@ -15935,7 +15935,7 @@
         </p:spPr>
         <p:txBody>
           <a:bodyPr wrap="none" lIns="45720" rIns="45720" tIns="18288" bIns="18288" anchor="ctr">
-            <a:spAutoFit/>
+            <a:noAutofit/>
           </a:bodyPr>
           <a:lstStyle/>
           <a:p>
@@ -15954,7 +15954,7 @@
       </p:sp>
       <p:pic>
         <p:nvPicPr>
-          <p:cNvPr id="14" name="Picture 13" descr="1905c59e110073ef.png"/>
+          <p:cNvPr id="14" name="Picture 13" descr="a0a2abe2b8b88c6f.png"/>
           <p:cNvPicPr>
             <a:picLocks noChangeAspect="1"/>
           </p:cNvPicPr>
@@ -15968,8 +15968,8 @@
         </p:blipFill>
         <p:spPr>
           <a:xfrm>
-            <a:off x="8302244" y="2340864"/>
-            <a:ext cx="1987296" cy="502920"/>
+            <a:off x="7558043" y="2340864"/>
+            <a:ext cx="1990344" cy="502920"/>
           </a:xfrm>
           <a:prstGeom prst="rect">
             <a:avLst/>
@@ -15978,7 +15978,7 @@
       </p:pic>
       <p:pic>
         <p:nvPicPr>
-          <p:cNvPr id="15" name="Picture 14" descr="f9e46f778edd7d7e.png"/>
+          <p:cNvPr id="15" name="Picture 14" descr="5dc53ddc22961e1d.png"/>
           <p:cNvPicPr>
             <a:picLocks noChangeAspect="1"/>
           </p:cNvPicPr>
@@ -15992,8 +15992,8 @@
         </p:blipFill>
         <p:spPr>
           <a:xfrm>
-            <a:off x="3876547" y="3118104"/>
-            <a:ext cx="1167384" cy="643128"/>
+            <a:off x="4067292" y="3122676"/>
+            <a:ext cx="1289304" cy="813816"/>
           </a:xfrm>
           <a:prstGeom prst="rect">
             <a:avLst/>
@@ -16008,8 +16008,8 @@
         </p:nvSpPr>
         <p:spPr>
           <a:xfrm>
-            <a:off x="5043931" y="3211068"/>
-            <a:ext cx="1927352" cy="457200"/>
+            <a:off x="5356596" y="3300984"/>
+            <a:ext cx="1183151" cy="457200"/>
           </a:xfrm>
           <a:prstGeom prst="rect">
             <a:avLst/>
@@ -16018,7 +16018,7 @@
         </p:spPr>
         <p:txBody>
           <a:bodyPr wrap="none" lIns="45720" rIns="45720" tIns="18288" bIns="18288" anchor="ctr">
-            <a:spAutoFit/>
+            <a:noAutofit/>
           </a:bodyPr>
           <a:lstStyle/>
           <a:p>
@@ -16037,7 +16037,7 @@
       </p:sp>
       <p:pic>
         <p:nvPicPr>
-          <p:cNvPr id="17" name="Picture 16" descr="37b1b7896b2c22ae.png"/>
+          <p:cNvPr id="17" name="Picture 16" descr="0b3fc4acebe111bc.png"/>
           <p:cNvPicPr>
             <a:picLocks noChangeAspect="1"/>
           </p:cNvPicPr>
@@ -16051,8 +16051,8 @@
         </p:blipFill>
         <p:spPr>
           <a:xfrm>
-            <a:off x="6834123" y="3118104"/>
-            <a:ext cx="1450848" cy="643128"/>
+            <a:off x="6402587" y="3118104"/>
+            <a:ext cx="1691640" cy="822960"/>
           </a:xfrm>
           <a:prstGeom prst="rect">
             <a:avLst/>
@@ -16067,7 +16067,7 @@
         </p:nvSpPr>
         <p:spPr>
           <a:xfrm>
-            <a:off x="987552" y="4099560"/>
+            <a:off x="987552" y="4279392"/>
             <a:ext cx="10131551" cy="950976"/>
           </a:xfrm>
           <a:prstGeom prst="rect">
@@ -16394,7 +16394,7 @@
       </p:cxnSp>
       <p:pic>
         <p:nvPicPr>
-          <p:cNvPr id="10" name="Picture 9" descr="4a42086a59a917f1.png"/>
+          <p:cNvPr id="10" name="Picture 9" descr="344afa7466e491c9.png"/>
           <p:cNvPicPr>
             <a:picLocks noChangeAspect="1"/>
           </p:cNvPicPr>
@@ -16408,8 +16408,8 @@
         </p:blipFill>
         <p:spPr>
           <a:xfrm>
-            <a:off x="2411984" y="2340864"/>
-            <a:ext cx="2084831" cy="557784"/>
+            <a:off x="2639304" y="2340864"/>
+            <a:ext cx="2374392" cy="740664"/>
           </a:xfrm>
           <a:prstGeom prst="rect">
             <a:avLst/>
@@ -16424,8 +16424,8 @@
         </p:nvSpPr>
         <p:spPr>
           <a:xfrm>
-            <a:off x="4496816" y="2391156"/>
-            <a:ext cx="1927352" cy="457200"/>
+            <a:off x="5013696" y="2482596"/>
+            <a:ext cx="1183151" cy="457200"/>
           </a:xfrm>
           <a:prstGeom prst="rect">
             <a:avLst/>
@@ -16434,7 +16434,7 @@
         </p:spPr>
         <p:txBody>
           <a:bodyPr wrap="none" lIns="45720" rIns="45720" tIns="18288" bIns="18288" anchor="ctr">
-            <a:spAutoFit/>
+            <a:noAutofit/>
           </a:bodyPr>
           <a:lstStyle/>
           <a:p>
@@ -16453,7 +16453,7 @@
       </p:sp>
       <p:pic>
         <p:nvPicPr>
-          <p:cNvPr id="12" name="Picture 11" descr="38738d0c460c39dc.png"/>
+          <p:cNvPr id="12" name="Picture 11" descr="32485dda09a6454c.png"/>
           <p:cNvPicPr>
             <a:picLocks noChangeAspect="1"/>
           </p:cNvPicPr>
@@ -16467,7 +16467,7 @@
         </p:blipFill>
         <p:spPr>
           <a:xfrm>
-            <a:off x="6287008" y="2368296"/>
+            <a:off x="6059687" y="2459736"/>
             <a:ext cx="3462528" cy="502920"/>
           </a:xfrm>
           <a:prstGeom prst="rect">
@@ -16477,7 +16477,7 @@
       </p:pic>
       <p:pic>
         <p:nvPicPr>
-          <p:cNvPr id="13" name="Picture 12" descr="a85ecce954e08430.png"/>
+          <p:cNvPr id="13" name="Picture 12" descr="1c083a55a6db1aed.png"/>
           <p:cNvPicPr>
             <a:picLocks noChangeAspect="1"/>
           </p:cNvPicPr>
@@ -16491,8 +16491,8 @@
         </p:blipFill>
         <p:spPr>
           <a:xfrm>
-            <a:off x="3880104" y="3172968"/>
-            <a:ext cx="4401312" cy="566928"/>
+            <a:off x="3730752" y="3355848"/>
+            <a:ext cx="4700016" cy="685800"/>
           </a:xfrm>
           <a:prstGeom prst="rect">
             <a:avLst/>
@@ -16507,7 +16507,7 @@
         </p:nvSpPr>
         <p:spPr>
           <a:xfrm>
-            <a:off x="987552" y="4078224"/>
+            <a:off x="987552" y="4379976"/>
             <a:ext cx="10131551" cy="475488"/>
           </a:xfrm>
           <a:prstGeom prst="rect">
@@ -16799,7 +16799,7 @@
       </p:sp>
       <p:pic>
         <p:nvPicPr>
-          <p:cNvPr id="9" name="Picture 8" descr="3d9e5bffa18e18f4.png"/>
+          <p:cNvPr id="9" name="Picture 8" descr="9bb1c8a15b2d7bbe.png"/>
           <p:cNvPicPr>
             <a:picLocks noChangeAspect="1"/>
           </p:cNvPicPr>
@@ -16813,8 +16813,8 @@
         </p:blipFill>
         <p:spPr>
           <a:xfrm>
-            <a:off x="4672583" y="2103120"/>
-            <a:ext cx="2816352" cy="560832"/>
+            <a:off x="4613148" y="2103120"/>
+            <a:ext cx="2935224" cy="676656"/>
           </a:xfrm>
           <a:prstGeom prst="rect">
             <a:avLst/>
@@ -16829,7 +16829,7 @@
         </p:nvSpPr>
         <p:spPr>
           <a:xfrm>
-            <a:off x="777240" y="3166872"/>
+            <a:off x="777240" y="3282696"/>
             <a:ext cx="10607040" cy="429370"/>
           </a:xfrm>
           <a:prstGeom prst="rect">
@@ -17121,7 +17121,7 @@
       </p:sp>
       <p:pic>
         <p:nvPicPr>
-          <p:cNvPr id="9" name="Picture 8" descr="9e77a7987789f817.png"/>
+          <p:cNvPr id="9" name="Picture 8" descr="888f9d60545f0d0f.png"/>
           <p:cNvPicPr>
             <a:picLocks noChangeAspect="1"/>
           </p:cNvPicPr>
@@ -17136,7 +17136,7 @@
         <p:spPr>
           <a:xfrm>
             <a:off x="1828800" y="1920240"/>
-            <a:ext cx="1511808" cy="515112"/>
+            <a:ext cx="1685544" cy="676656"/>
           </a:xfrm>
           <a:prstGeom prst="rect">
             <a:avLst/>
@@ -17151,7 +17151,7 @@
         </p:nvSpPr>
         <p:spPr>
           <a:xfrm>
-            <a:off x="3797808" y="1949196"/>
+            <a:off x="3971544" y="2029968"/>
             <a:ext cx="6400800" cy="502920"/>
           </a:xfrm>
           <a:prstGeom prst="rect">
@@ -17180,7 +17180,7 @@
       </p:sp>
       <p:pic>
         <p:nvPicPr>
-          <p:cNvPr id="11" name="Picture 10" descr="e40c05bb1358cee5.png"/>
+          <p:cNvPr id="11" name="Picture 10" descr="0f750478274c693a.png"/>
           <p:cNvPicPr>
             <a:picLocks noChangeAspect="1"/>
           </p:cNvPicPr>
@@ -17194,7 +17194,7 @@
         </p:blipFill>
         <p:spPr>
           <a:xfrm>
-            <a:off x="1828800" y="2709672"/>
+            <a:off x="1828800" y="2871215"/>
             <a:ext cx="3276600" cy="502920"/>
           </a:xfrm>
           <a:prstGeom prst="rect">
@@ -17210,7 +17210,7 @@
         </p:nvSpPr>
         <p:spPr>
           <a:xfrm>
-            <a:off x="5562600" y="2732532"/>
+            <a:off x="5562600" y="2894075"/>
             <a:ext cx="5821679" cy="502920"/>
           </a:xfrm>
           <a:prstGeom prst="rect">
@@ -17239,7 +17239,7 @@
       </p:sp>
       <p:pic>
         <p:nvPicPr>
-          <p:cNvPr id="13" name="Picture 12" descr="5e0a5c40fa70e712.png"/>
+          <p:cNvPr id="13" name="Picture 12" descr="bdab02e30458e0d1.png"/>
           <p:cNvPicPr>
             <a:picLocks noChangeAspect="1"/>
           </p:cNvPicPr>
@@ -17253,8 +17253,8 @@
         </p:blipFill>
         <p:spPr>
           <a:xfrm>
-            <a:off x="1828800" y="3486912"/>
-            <a:ext cx="1478280" cy="515112"/>
+            <a:off x="1828800" y="3648455"/>
+            <a:ext cx="1655064" cy="679704"/>
           </a:xfrm>
           <a:prstGeom prst="rect">
             <a:avLst/>
@@ -17269,7 +17269,7 @@
         </p:nvSpPr>
         <p:spPr>
           <a:xfrm>
-            <a:off x="3764280" y="3515868"/>
+            <a:off x="3941064" y="3759707"/>
             <a:ext cx="6400800" cy="502920"/>
           </a:xfrm>
           <a:prstGeom prst="rect">
@@ -17304,7 +17304,7 @@
         </p:nvSpPr>
         <p:spPr>
           <a:xfrm>
-            <a:off x="777240" y="4572000"/>
+            <a:off x="777240" y="4785359"/>
             <a:ext cx="10607040" cy="548640"/>
           </a:xfrm>
           <a:prstGeom prst="rect">
@@ -17596,7 +17596,7 @@
       </p:sp>
       <p:pic>
         <p:nvPicPr>
-          <p:cNvPr id="9" name="Picture 8" descr="8dc2de9a2f7be10c.png"/>
+          <p:cNvPr id="9" name="Picture 8" descr="951716e95210eae7.png"/>
           <p:cNvPicPr>
             <a:picLocks noChangeAspect="1"/>
           </p:cNvPicPr>
@@ -17610,8 +17610,8 @@
         </p:blipFill>
         <p:spPr>
           <a:xfrm>
-            <a:off x="4375403" y="2194560"/>
-            <a:ext cx="3410712" cy="707136"/>
+            <a:off x="4300728" y="2194560"/>
+            <a:ext cx="3560064" cy="859536"/>
           </a:xfrm>
           <a:prstGeom prst="rect">
             <a:avLst/>

--- a/a7/packages/A7 Unit 4 - Solving Problems with Rational Numbers/Slides/A7 4.05  Slides.pptx
+++ b/a7/packages/A7 Unit 4 - Solving Problems with Rational Numbers/Slides/A7 4.05  Slides.pptx
@@ -6335,23 +6335,23 @@
         </p:nvSpPr>
         <p:spPr>
           <a:xfrm>
-            <a:off x="777240" y="2194560"/>
-            <a:ext cx="10607040" cy="465151"/>
-          </a:xfrm>
-          <a:prstGeom prst="rect">
-            <a:avLst/>
-          </a:prstGeom>
-          <a:noFill/>
-        </p:spPr>
-        <p:txBody>
-          <a:bodyPr wrap="square" lIns="45720" rIns="45720" tIns="18288" bIns="18288" anchor="t">
-            <a:spAutoFit/>
-          </a:bodyPr>
-          <a:lstStyle/>
-          <a:p>
-            <a:pPr algn="ctr"/>
-            <a:r>
-              <a:rPr sz="2600" b="0" i="0">
+            <a:off x="1234440" y="1874519"/>
+            <a:ext cx="10058400" cy="429370"/>
+          </a:xfrm>
+          <a:prstGeom prst="rect">
+            <a:avLst/>
+          </a:prstGeom>
+          <a:noFill/>
+        </p:spPr>
+        <p:txBody>
+          <a:bodyPr wrap="square" lIns="45720" rIns="45720" tIns="18288" bIns="18288" anchor="t">
+            <a:spAutoFit/>
+          </a:bodyPr>
+          <a:lstStyle/>
+          <a:p>
+            <a:pPr algn="l"/>
+            <a:r>
+              <a:rPr sz="2400" b="0" i="0">
                 <a:solidFill>
                   <a:srgbClr val="1A1A1A"/>
                 </a:solidFill>
@@ -6370,23 +6370,23 @@
         </p:nvSpPr>
         <p:spPr>
           <a:xfrm>
-            <a:off x="777240" y="2769439"/>
-            <a:ext cx="10607040" cy="465151"/>
-          </a:xfrm>
-          <a:prstGeom prst="rect">
-            <a:avLst/>
-          </a:prstGeom>
-          <a:noFill/>
-        </p:spPr>
-        <p:txBody>
-          <a:bodyPr wrap="square" lIns="45720" rIns="45720" tIns="18288" bIns="18288" anchor="t">
-            <a:spAutoFit/>
-          </a:bodyPr>
-          <a:lstStyle/>
-          <a:p>
-            <a:pPr algn="ctr"/>
-            <a:r>
-              <a:rPr sz="2600" b="0" i="0">
+            <a:off x="1234440" y="2413618"/>
+            <a:ext cx="10058400" cy="429370"/>
+          </a:xfrm>
+          <a:prstGeom prst="rect">
+            <a:avLst/>
+          </a:prstGeom>
+          <a:noFill/>
+        </p:spPr>
+        <p:txBody>
+          <a:bodyPr wrap="square" lIns="45720" rIns="45720" tIns="18288" bIns="18288" anchor="t">
+            <a:spAutoFit/>
+          </a:bodyPr>
+          <a:lstStyle/>
+          <a:p>
+            <a:pPr algn="l"/>
+            <a:r>
+              <a:rPr sz="2400" b="0" i="0">
                 <a:solidFill>
                   <a:srgbClr val="1A1A1A"/>
                 </a:solidFill>
@@ -6405,23 +6405,23 @@
         </p:nvSpPr>
         <p:spPr>
           <a:xfrm>
-            <a:off x="777240" y="3344318"/>
-            <a:ext cx="10607040" cy="465151"/>
-          </a:xfrm>
-          <a:prstGeom prst="rect">
-            <a:avLst/>
-          </a:prstGeom>
-          <a:noFill/>
-        </p:spPr>
-        <p:txBody>
-          <a:bodyPr wrap="square" lIns="45720" rIns="45720" tIns="18288" bIns="18288" anchor="t">
-            <a:spAutoFit/>
-          </a:bodyPr>
-          <a:lstStyle/>
-          <a:p>
-            <a:pPr algn="ctr"/>
-            <a:r>
-              <a:rPr sz="2600" b="0" i="0">
+            <a:off x="1234440" y="2952716"/>
+            <a:ext cx="10058400" cy="429370"/>
+          </a:xfrm>
+          <a:prstGeom prst="rect">
+            <a:avLst/>
+          </a:prstGeom>
+          <a:noFill/>
+        </p:spPr>
+        <p:txBody>
+          <a:bodyPr wrap="square" lIns="45720" rIns="45720" tIns="18288" bIns="18288" anchor="t">
+            <a:spAutoFit/>
+          </a:bodyPr>
+          <a:lstStyle/>
+          <a:p>
+            <a:pPr algn="l"/>
+            <a:r>
+              <a:rPr sz="2400" b="1" i="0">
                 <a:solidFill>
                   <a:srgbClr val="1A1A1A"/>
                 </a:solidFill>
@@ -6463,41 +6463,6 @@
                 <a:latin typeface="Century Schoolbook"/>
               </a:rPr>
               <a:t>Answer it.</a:t>
-            </a:r>
-          </a:p>
-        </p:txBody>
-      </p:sp>
-      <p:sp>
-        <p:nvSpPr>
-          <p:cNvPr id="13" name="TextBox 12"/>
-          <p:cNvSpPr txBox="1"/>
-          <p:nvPr/>
-        </p:nvSpPr>
-        <p:spPr>
-          <a:xfrm>
-            <a:off x="777240" y="4828032"/>
-            <a:ext cx="10607040" cy="365760"/>
-          </a:xfrm>
-          <a:prstGeom prst="rect">
-            <a:avLst/>
-          </a:prstGeom>
-          <a:noFill/>
-        </p:spPr>
-        <p:txBody>
-          <a:bodyPr wrap="square" lIns="45720" rIns="45720" tIns="18288" bIns="18288" anchor="t">
-            <a:spAutoFit/>
-          </a:bodyPr>
-          <a:lstStyle/>
-          <a:p>
-            <a:pPr algn="ctr"/>
-            <a:r>
-              <a:rPr sz="1900" b="0" i="1">
-                <a:solidFill>
-                  <a:srgbClr val="6B6B6B"/>
-                </a:solidFill>
-                <a:latin typeface="Century Schoolbook"/>
-              </a:rPr>
-              <a:t>A square's side is the root of its area.</a:t>
             </a:r>
           </a:p>
         </p:txBody>
@@ -6773,23 +6738,23 @@
         </p:nvSpPr>
         <p:spPr>
           <a:xfrm>
-            <a:off x="777240" y="2103120"/>
-            <a:ext cx="10607040" cy="465151"/>
-          </a:xfrm>
-          <a:prstGeom prst="rect">
-            <a:avLst/>
-          </a:prstGeom>
-          <a:noFill/>
-        </p:spPr>
-        <p:txBody>
-          <a:bodyPr wrap="square" lIns="45720" rIns="45720" tIns="18288" bIns="18288" anchor="t">
-            <a:spAutoFit/>
-          </a:bodyPr>
-          <a:lstStyle/>
-          <a:p>
-            <a:pPr algn="ctr"/>
-            <a:r>
-              <a:rPr sz="2600" b="0" i="0">
+            <a:off x="1234440" y="1874519"/>
+            <a:ext cx="10058400" cy="429370"/>
+          </a:xfrm>
+          <a:prstGeom prst="rect">
+            <a:avLst/>
+          </a:prstGeom>
+          <a:noFill/>
+        </p:spPr>
+        <p:txBody>
+          <a:bodyPr wrap="square" lIns="45720" rIns="45720" tIns="18288" bIns="18288" anchor="t">
+            <a:spAutoFit/>
+          </a:bodyPr>
+          <a:lstStyle/>
+          <a:p>
+            <a:pPr algn="l"/>
+            <a:r>
+              <a:rPr sz="2400" b="0" i="0">
                 <a:solidFill>
                   <a:srgbClr val="1A1A1A"/>
                 </a:solidFill>
@@ -6808,23 +6773,23 @@
         </p:nvSpPr>
         <p:spPr>
           <a:xfrm>
-            <a:off x="777240" y="2677999"/>
-            <a:ext cx="10607040" cy="465151"/>
-          </a:xfrm>
-          <a:prstGeom prst="rect">
-            <a:avLst/>
-          </a:prstGeom>
-          <a:noFill/>
-        </p:spPr>
-        <p:txBody>
-          <a:bodyPr wrap="square" lIns="45720" rIns="45720" tIns="18288" bIns="18288" anchor="t">
-            <a:spAutoFit/>
-          </a:bodyPr>
-          <a:lstStyle/>
-          <a:p>
-            <a:pPr algn="ctr"/>
-            <a:r>
-              <a:rPr sz="2600" b="0" i="0">
+            <a:off x="1234440" y="2413618"/>
+            <a:ext cx="10058400" cy="429370"/>
+          </a:xfrm>
+          <a:prstGeom prst="rect">
+            <a:avLst/>
+          </a:prstGeom>
+          <a:noFill/>
+        </p:spPr>
+        <p:txBody>
+          <a:bodyPr wrap="square" lIns="45720" rIns="45720" tIns="18288" bIns="18288" anchor="t">
+            <a:spAutoFit/>
+          </a:bodyPr>
+          <a:lstStyle/>
+          <a:p>
+            <a:pPr algn="l"/>
+            <a:r>
+              <a:rPr sz="2400" b="0" i="0">
                 <a:solidFill>
                   <a:srgbClr val="1A1A1A"/>
                 </a:solidFill>
@@ -6843,23 +6808,23 @@
         </p:nvSpPr>
         <p:spPr>
           <a:xfrm>
-            <a:off x="777240" y="3252878"/>
-            <a:ext cx="10607040" cy="465151"/>
-          </a:xfrm>
-          <a:prstGeom prst="rect">
-            <a:avLst/>
-          </a:prstGeom>
-          <a:noFill/>
-        </p:spPr>
-        <p:txBody>
-          <a:bodyPr wrap="square" lIns="45720" rIns="45720" tIns="18288" bIns="18288" anchor="t">
-            <a:spAutoFit/>
-          </a:bodyPr>
-          <a:lstStyle/>
-          <a:p>
-            <a:pPr algn="ctr"/>
-            <a:r>
-              <a:rPr sz="2600" b="0" i="0">
+            <a:off x="1234440" y="2952716"/>
+            <a:ext cx="10058400" cy="429370"/>
+          </a:xfrm>
+          <a:prstGeom prst="rect">
+            <a:avLst/>
+          </a:prstGeom>
+          <a:noFill/>
+        </p:spPr>
+        <p:txBody>
+          <a:bodyPr wrap="square" lIns="45720" rIns="45720" tIns="18288" bIns="18288" anchor="t">
+            <a:spAutoFit/>
+          </a:bodyPr>
+          <a:lstStyle/>
+          <a:p>
+            <a:pPr algn="l"/>
+            <a:r>
+              <a:rPr sz="2400" b="1" i="0">
                 <a:solidFill>
                   <a:srgbClr val="1A1A1A"/>
                 </a:solidFill>
@@ -6878,7 +6843,7 @@
         </p:nvSpPr>
         <p:spPr>
           <a:xfrm>
-            <a:off x="1828800" y="3873477"/>
+            <a:off x="1828800" y="3583255"/>
             <a:ext cx="8503920" cy="548640"/>
           </a:xfrm>
           <a:prstGeom prst="rect">

--- a/a7/packages/A7 Unit 4 - Solving Problems with Rational Numbers/Slides/A7 4.05  Slides.pptx
+++ b/a7/packages/A7 Unit 4 - Solving Problems with Rational Numbers/Slides/A7 4.05  Slides.pptx
@@ -3442,7 +3442,7 @@
                 </a:solidFill>
                 <a:latin typeface="Century Schoolbook"/>
               </a:rPr>
-              <a:t>Today the radical sign comes back — and its bar is a grouping symbol.</a:t>
+              <a:t>Today the radical returns — its bar is a grouping symbol.</a:t>
             </a:r>
           </a:p>
         </p:txBody>
